--- a/Plantillas/Plantilla presentación.pptx
+++ b/Plantillas/Plantilla presentación.pptx
@@ -5,10 +5,10 @@
     <p:sldMasterId id="2147483648" r:id="rId4"/>
   </p:sldMasterIdLst>
   <p:notesMasterIdLst>
-    <p:notesMasterId r:id="rId19"/>
+    <p:notesMasterId r:id="rId20"/>
   </p:notesMasterIdLst>
   <p:handoutMasterIdLst>
-    <p:handoutMasterId r:id="rId20"/>
+    <p:handoutMasterId r:id="rId21"/>
   </p:handoutMasterIdLst>
   <p:sldIdLst>
     <p:sldId id="256" r:id="rId5"/>
@@ -20,11 +20,12 @@
     <p:sldId id="295" r:id="rId11"/>
     <p:sldId id="268" r:id="rId12"/>
     <p:sldId id="296" r:id="rId13"/>
-    <p:sldId id="297" r:id="rId14"/>
-    <p:sldId id="298" r:id="rId15"/>
-    <p:sldId id="299" r:id="rId16"/>
-    <p:sldId id="300" r:id="rId17"/>
-    <p:sldId id="276" r:id="rId18"/>
+    <p:sldId id="302" r:id="rId14"/>
+    <p:sldId id="297" r:id="rId15"/>
+    <p:sldId id="298" r:id="rId16"/>
+    <p:sldId id="299" r:id="rId17"/>
+    <p:sldId id="300" r:id="rId18"/>
+    <p:sldId id="276" r:id="rId19"/>
   </p:sldIdLst>
   <p:sldSz cx="12192000" cy="6858000"/>
   <p:notesSz cx="6858000" cy="9144000"/>
@@ -256,7 +257,7 @@
           <a:p>
             <a:fld id="{058ABBF3-49A8-4B3F-9773-22E67695BB12}" type="datetimeFigureOut">
               <a:rPr lang="en-US" smtClean="0"/>
-              <a:t>8/27/2025</a:t>
+              <a:t>9/1/2025</a:t>
             </a:fld>
             <a:endParaRPr lang="en-US" dirty="0"/>
           </a:p>
@@ -433,7 +434,7 @@
           <a:p>
             <a:fld id="{F44AAC2B-A50D-4386-849A-6B59FB991B4C}" type="datetimeFigureOut">
               <a:rPr lang="en-US" smtClean="0"/>
-              <a:t>8/27/2025</a:t>
+              <a:t>9/1/2025</a:t>
             </a:fld>
             <a:endParaRPr lang="en-US" dirty="0"/>
           </a:p>
@@ -792,6 +793,114 @@
         <p:cNvPr id="1" name="">
           <a:extLst>
             <a:ext uri="{FF2B5EF4-FFF2-40B4-BE49-F238E27FC236}">
+              <a16:creationId xmlns:a16="http://schemas.microsoft.com/office/drawing/2014/main" id="{2C7681A8-60ED-E18C-9D80-676D14691CEC}"/>
+            </a:ext>
+          </a:extLst>
+        </p:cNvPr>
+        <p:cNvGrpSpPr/>
+        <p:nvPr/>
+      </p:nvGrpSpPr>
+      <p:grpSpPr>
+        <a:xfrm>
+          <a:off x="0" y="0"/>
+          <a:ext cx="0" cy="0"/>
+          <a:chOff x="0" y="0"/>
+          <a:chExt cx="0" cy="0"/>
+        </a:xfrm>
+      </p:grpSpPr>
+      <p:sp>
+        <p:nvSpPr>
+          <p:cNvPr id="2" name="Slide Image Placeholder 1">
+            <a:extLst>
+              <a:ext uri="{FF2B5EF4-FFF2-40B4-BE49-F238E27FC236}">
+                <a16:creationId xmlns:a16="http://schemas.microsoft.com/office/drawing/2014/main" id="{A61F5D0B-7172-B130-8261-A163DFE2082D}"/>
+              </a:ext>
+            </a:extLst>
+          </p:cNvPr>
+          <p:cNvSpPr>
+            <a:spLocks noGrp="1" noRot="1" noChangeAspect="1"/>
+          </p:cNvSpPr>
+          <p:nvPr>
+            <p:ph type="sldImg"/>
+          </p:nvPr>
+        </p:nvSpPr>
+        <p:spPr/>
+      </p:sp>
+      <p:sp>
+        <p:nvSpPr>
+          <p:cNvPr id="3" name="Notes Placeholder 2">
+            <a:extLst>
+              <a:ext uri="{FF2B5EF4-FFF2-40B4-BE49-F238E27FC236}">
+                <a16:creationId xmlns:a16="http://schemas.microsoft.com/office/drawing/2014/main" id="{02FA75BE-A519-4251-F44C-FBE4DC111106}"/>
+              </a:ext>
+            </a:extLst>
+          </p:cNvPr>
+          <p:cNvSpPr>
+            <a:spLocks noGrp="1"/>
+          </p:cNvSpPr>
+          <p:nvPr>
+            <p:ph type="body" idx="1"/>
+          </p:nvPr>
+        </p:nvSpPr>
+        <p:spPr/>
+        <p:txBody>
+          <a:bodyPr/>
+          <a:lstStyle/>
+          <a:p>
+            <a:endParaRPr lang="en-US"/>
+          </a:p>
+        </p:txBody>
+      </p:sp>
+      <p:sp>
+        <p:nvSpPr>
+          <p:cNvPr id="4" name="Slide Number Placeholder 3">
+            <a:extLst>
+              <a:ext uri="{FF2B5EF4-FFF2-40B4-BE49-F238E27FC236}">
+                <a16:creationId xmlns:a16="http://schemas.microsoft.com/office/drawing/2014/main" id="{B5A4692C-8D1B-A863-9ECB-B6878B4CB282}"/>
+              </a:ext>
+            </a:extLst>
+          </p:cNvPr>
+          <p:cNvSpPr>
+            <a:spLocks noGrp="1"/>
+          </p:cNvSpPr>
+          <p:nvPr>
+            <p:ph type="sldNum" sz="quarter" idx="5"/>
+          </p:nvPr>
+        </p:nvSpPr>
+        <p:spPr/>
+        <p:txBody>
+          <a:bodyPr/>
+          <a:lstStyle/>
+          <a:p>
+            <a:fld id="{10895658-EA1F-4910-80AB-4DA76E167475}" type="slidenum">
+              <a:rPr lang="en-US" smtClean="0"/>
+              <a:t>10</a:t>
+            </a:fld>
+            <a:endParaRPr lang="en-US" dirty="0"/>
+          </a:p>
+        </p:txBody>
+      </p:sp>
+    </p:spTree>
+    <p:extLst>
+      <p:ext uri="{BB962C8B-B14F-4D97-AF65-F5344CB8AC3E}">
+        <p14:creationId xmlns:p14="http://schemas.microsoft.com/office/powerpoint/2010/main" val="1350517486"/>
+      </p:ext>
+    </p:extLst>
+  </p:cSld>
+  <p:clrMapOvr>
+    <a:masterClrMapping/>
+  </p:clrMapOvr>
+</p:notes>
+</file>
+
+<file path=ppt/notesSlides/notesSlide11.xml><?xml version="1.0" encoding="utf-8"?>
+<p:notes xmlns:a="http://schemas.openxmlformats.org/drawingml/2006/main" xmlns:r="http://schemas.openxmlformats.org/officeDocument/2006/relationships" xmlns:p="http://schemas.openxmlformats.org/presentationml/2006/main">
+  <p:cSld>
+    <p:spTree>
+      <p:nvGrpSpPr>
+        <p:cNvPr id="1" name="">
+          <a:extLst>
+            <a:ext uri="{FF2B5EF4-FFF2-40B4-BE49-F238E27FC236}">
               <a16:creationId xmlns:a16="http://schemas.microsoft.com/office/drawing/2014/main" id="{05FC0554-D1E5-451E-0A53-3C7EB62CD671}"/>
             </a:ext>
           </a:extLst>
@@ -873,7 +982,7 @@
           <a:p>
             <a:fld id="{10895658-EA1F-4910-80AB-4DA76E167475}" type="slidenum">
               <a:rPr lang="en-US" smtClean="0"/>
-              <a:t>10</a:t>
+              <a:t>11</a:t>
             </a:fld>
             <a:endParaRPr lang="en-US" dirty="0"/>
           </a:p>
@@ -892,7 +1001,7 @@
 </p:notes>
 </file>
 
-<file path=ppt/notesSlides/notesSlide11.xml><?xml version="1.0" encoding="utf-8"?>
+<file path=ppt/notesSlides/notesSlide12.xml><?xml version="1.0" encoding="utf-8"?>
 <p:notes xmlns:a="http://schemas.openxmlformats.org/drawingml/2006/main" xmlns:r="http://schemas.openxmlformats.org/officeDocument/2006/relationships" xmlns:p="http://schemas.openxmlformats.org/presentationml/2006/main">
   <p:cSld>
     <p:spTree>
@@ -981,7 +1090,7 @@
           <a:p>
             <a:fld id="{10895658-EA1F-4910-80AB-4DA76E167475}" type="slidenum">
               <a:rPr lang="en-US" smtClean="0"/>
-              <a:t>11</a:t>
+              <a:t>12</a:t>
             </a:fld>
             <a:endParaRPr lang="en-US" dirty="0"/>
           </a:p>
@@ -1000,7 +1109,7 @@
 </p:notes>
 </file>
 
-<file path=ppt/notesSlides/notesSlide12.xml><?xml version="1.0" encoding="utf-8"?>
+<file path=ppt/notesSlides/notesSlide13.xml><?xml version="1.0" encoding="utf-8"?>
 <p:notes xmlns:a="http://schemas.openxmlformats.org/drawingml/2006/main" xmlns:r="http://schemas.openxmlformats.org/officeDocument/2006/relationships" xmlns:p="http://schemas.openxmlformats.org/presentationml/2006/main">
   <p:cSld>
     <p:spTree>
@@ -1089,7 +1198,7 @@
           <a:p>
             <a:fld id="{10895658-EA1F-4910-80AB-4DA76E167475}" type="slidenum">
               <a:rPr lang="en-US" smtClean="0"/>
-              <a:t>12</a:t>
+              <a:t>13</a:t>
             </a:fld>
             <a:endParaRPr lang="en-US" dirty="0"/>
           </a:p>
@@ -1108,7 +1217,7 @@
 </p:notes>
 </file>
 
-<file path=ppt/notesSlides/notesSlide13.xml><?xml version="1.0" encoding="utf-8"?>
+<file path=ppt/notesSlides/notesSlide14.xml><?xml version="1.0" encoding="utf-8"?>
 <p:notes xmlns:a="http://schemas.openxmlformats.org/drawingml/2006/main" xmlns:r="http://schemas.openxmlformats.org/officeDocument/2006/relationships" xmlns:p="http://schemas.openxmlformats.org/presentationml/2006/main">
   <p:cSld>
     <p:spTree>
@@ -1197,7 +1306,7 @@
           <a:p>
             <a:fld id="{10895658-EA1F-4910-80AB-4DA76E167475}" type="slidenum">
               <a:rPr lang="en-US" smtClean="0"/>
-              <a:t>13</a:t>
+              <a:t>14</a:t>
             </a:fld>
             <a:endParaRPr lang="en-US" dirty="0"/>
           </a:p>
@@ -1216,7 +1325,7 @@
 </p:notes>
 </file>
 
-<file path=ppt/notesSlides/notesSlide14.xml><?xml version="1.0" encoding="utf-8"?>
+<file path=ppt/notesSlides/notesSlide15.xml><?xml version="1.0" encoding="utf-8"?>
 <p:notes xmlns:a="http://schemas.openxmlformats.org/drawingml/2006/main" xmlns:r="http://schemas.openxmlformats.org/officeDocument/2006/relationships" xmlns:p="http://schemas.openxmlformats.org/presentationml/2006/main">
   <p:cSld>
     <p:spTree>
@@ -1281,7 +1390,7 @@
           <a:p>
             <a:fld id="{10895658-EA1F-4910-80AB-4DA76E167475}" type="slidenum">
               <a:rPr lang="en-US" smtClean="0"/>
-              <a:t>14</a:t>
+              <a:t>15</a:t>
             </a:fld>
             <a:endParaRPr lang="en-US" dirty="0"/>
           </a:p>
@@ -21268,17 +21377,13 @@
               <a:rPr lang="es-419" dirty="0" err="1"/>
               <a:t>ón</a:t>
             </a:r>
+            <a:r>
+              <a:rPr lang="es-419" dirty="0"/>
+              <a:t> CASO </a:t>
+            </a:r>
             <a:br>
               <a:rPr lang="es-419" dirty="0"/>
             </a:br>
-            <a:r>
-              <a:rPr lang="es-419" dirty="0"/>
-              <a:t>Coffe </a:t>
-            </a:r>
-            <a:r>
-              <a:rPr lang="es-419" dirty="0" err="1"/>
-              <a:t>Maker</a:t>
-            </a:r>
             <a:endParaRPr lang="en-US" dirty="0"/>
           </a:p>
         </p:txBody>
@@ -21297,6 +21402,227 @@
 </file>
 
 <file path=ppt/slides/slide10.xml><?xml version="1.0" encoding="utf-8"?>
+<p:sld xmlns:a="http://schemas.openxmlformats.org/drawingml/2006/main" xmlns:r="http://schemas.openxmlformats.org/officeDocument/2006/relationships" xmlns:p="http://schemas.openxmlformats.org/presentationml/2006/main">
+  <p:cSld>
+    <p:spTree>
+      <p:nvGrpSpPr>
+        <p:cNvPr id="1" name="">
+          <a:extLst>
+            <a:ext uri="{FF2B5EF4-FFF2-40B4-BE49-F238E27FC236}">
+              <a16:creationId xmlns:a16="http://schemas.microsoft.com/office/drawing/2014/main" id="{112A69AD-3F28-F1B9-5B75-5827142F8C2C}"/>
+            </a:ext>
+          </a:extLst>
+        </p:cNvPr>
+        <p:cNvGrpSpPr/>
+        <p:nvPr/>
+      </p:nvGrpSpPr>
+      <p:grpSpPr>
+        <a:xfrm>
+          <a:off x="0" y="0"/>
+          <a:ext cx="0" cy="0"/>
+          <a:chOff x="0" y="0"/>
+          <a:chExt cx="0" cy="0"/>
+        </a:xfrm>
+      </p:grpSpPr>
+      <p:sp>
+        <p:nvSpPr>
+          <p:cNvPr id="4" name="Title 3">
+            <a:extLst>
+              <a:ext uri="{FF2B5EF4-FFF2-40B4-BE49-F238E27FC236}">
+                <a16:creationId xmlns:a16="http://schemas.microsoft.com/office/drawing/2014/main" id="{28CDE1EF-89EB-63FF-EC6A-4066F0449C3B}"/>
+              </a:ext>
+            </a:extLst>
+          </p:cNvPr>
+          <p:cNvSpPr>
+            <a:spLocks noGrp="1"/>
+          </p:cNvSpPr>
+          <p:nvPr>
+            <p:ph type="title"/>
+          </p:nvPr>
+        </p:nvSpPr>
+        <p:spPr>
+          <a:xfrm>
+            <a:off x="771736" y="896112"/>
+            <a:ext cx="9389288" cy="727415"/>
+          </a:xfrm>
+        </p:spPr>
+        <p:txBody>
+          <a:bodyPr/>
+          <a:lstStyle/>
+          <a:p>
+            <a:r>
+              <a:rPr lang="es-419" dirty="0"/>
+              <a:t>Organigrama</a:t>
+            </a:r>
+            <a:endParaRPr lang="en-US" dirty="0"/>
+          </a:p>
+        </p:txBody>
+      </p:sp>
+      <p:sp>
+        <p:nvSpPr>
+          <p:cNvPr id="7" name="Slide Number Placeholder 6">
+            <a:extLst>
+              <a:ext uri="{FF2B5EF4-FFF2-40B4-BE49-F238E27FC236}">
+                <a16:creationId xmlns:a16="http://schemas.microsoft.com/office/drawing/2014/main" id="{4782A8EC-727B-948D-3CC6-5DFB6F8DE8FD}"/>
+              </a:ext>
+            </a:extLst>
+          </p:cNvPr>
+          <p:cNvSpPr>
+            <a:spLocks noGrp="1"/>
+          </p:cNvSpPr>
+          <p:nvPr>
+            <p:ph type="sldNum" sz="quarter" idx="12"/>
+          </p:nvPr>
+        </p:nvSpPr>
+        <p:spPr/>
+        <p:txBody>
+          <a:bodyPr/>
+          <a:lstStyle/>
+          <a:p>
+            <a:fld id="{B5CEABB6-07DC-46E8-9B57-56EC44A396E5}" type="slidenum">
+              <a:rPr lang="en-US" smtClean="0"/>
+              <a:pPr/>
+              <a:t>10</a:t>
+            </a:fld>
+            <a:endParaRPr lang="en-US" dirty="0"/>
+          </a:p>
+        </p:txBody>
+      </p:sp>
+      <p:sp>
+        <p:nvSpPr>
+          <p:cNvPr id="8" name="Rectangle 3">
+            <a:extLst>
+              <a:ext uri="{FF2B5EF4-FFF2-40B4-BE49-F238E27FC236}">
+                <a16:creationId xmlns:a16="http://schemas.microsoft.com/office/drawing/2014/main" id="{D1A8BDD4-44E7-7410-2214-8B9027A3C74C}"/>
+              </a:ext>
+            </a:extLst>
+          </p:cNvPr>
+          <p:cNvSpPr>
+            <a:spLocks noGrp="1" noChangeArrowheads="1"/>
+          </p:cNvSpPr>
+          <p:nvPr>
+            <p:ph sz="half" idx="14"/>
+          </p:nvPr>
+        </p:nvSpPr>
+        <p:spPr bwMode="auto">
+          <a:xfrm>
+            <a:off x="846170" y="1762026"/>
+            <a:ext cx="264816" cy="369332"/>
+          </a:xfrm>
+          <a:prstGeom prst="rect">
+            <a:avLst/>
+          </a:prstGeom>
+          <a:noFill/>
+          <a:ln>
+            <a:noFill/>
+          </a:ln>
+          <a:effectLst/>
+          <a:extLst>
+            <a:ext uri="{909E8E84-426E-40DD-AFC4-6F175D3DCCD1}">
+              <a14:hiddenFill xmlns:a14="http://schemas.microsoft.com/office/drawing/2010/main">
+                <a:solidFill>
+                  <a:schemeClr val="accent1"/>
+                </a:solidFill>
+              </a14:hiddenFill>
+            </a:ext>
+            <a:ext uri="{91240B29-F687-4F45-9708-019B960494DF}">
+              <a14:hiddenLine xmlns:a14="http://schemas.microsoft.com/office/drawing/2010/main" w="9525">
+                <a:solidFill>
+                  <a:schemeClr val="tx1"/>
+                </a:solidFill>
+                <a:miter lim="800000"/>
+                <a:headEnd/>
+                <a:tailEnd/>
+              </a14:hiddenLine>
+            </a:ext>
+            <a:ext uri="{AF507438-7753-43E0-B8FC-AC1667EBCBE1}">
+              <a14:hiddenEffects xmlns:a14="http://schemas.microsoft.com/office/drawing/2010/main">
+                <a:effectLst>
+                  <a:outerShdw dist="35921" dir="2700000" algn="ctr" rotWithShape="0">
+                    <a:schemeClr val="bg2"/>
+                  </a:outerShdw>
+                </a:effectLst>
+              </a14:hiddenEffects>
+            </a:ext>
+          </a:extLst>
+        </p:spPr>
+        <p:txBody>
+          <a:bodyPr vert="horz" wrap="none" lIns="91440" tIns="45720" rIns="91440" bIns="45720" numCol="1" anchor="ctr" anchorCtr="0" compatLnSpc="1">
+            <a:prstTxWarp prst="textNoShape">
+              <a:avLst/>
+            </a:prstTxWarp>
+            <a:spAutoFit/>
+          </a:bodyPr>
+          <a:lstStyle/>
+          <a:p>
+            <a:pPr marL="0" marR="0" lvl="0" indent="0" algn="l" defTabSz="914400" rtl="0" eaLnBrk="0" fontAlgn="base" latinLnBrk="0" hangingPunct="0">
+              <a:lnSpc>
+                <a:spcPct val="100000"/>
+              </a:lnSpc>
+              <a:spcBef>
+                <a:spcPct val="0"/>
+              </a:spcBef>
+              <a:spcAft>
+                <a:spcPct val="0"/>
+              </a:spcAft>
+              <a:buClrTx/>
+              <a:buSzTx/>
+              <a:buFontTx/>
+              <a:buChar char="•"/>
+              <a:tabLst/>
+            </a:pPr>
+            <a:endParaRPr kumimoji="0" lang="en-US" altLang="en-US" sz="1800" b="0" i="0" u="none" strike="noStrike" cap="none" normalizeH="0" baseline="0" dirty="0">
+              <a:ln>
+                <a:noFill/>
+              </a:ln>
+              <a:solidFill>
+                <a:schemeClr val="tx1"/>
+              </a:solidFill>
+              <a:effectLst/>
+              <a:latin typeface="Arial" panose="020B0604020202020204" pitchFamily="34" charset="0"/>
+            </a:endParaRPr>
+          </a:p>
+        </p:txBody>
+      </p:sp>
+      <p:sp>
+        <p:nvSpPr>
+          <p:cNvPr id="6" name="Content Placeholder 5">
+            <a:extLst>
+              <a:ext uri="{FF2B5EF4-FFF2-40B4-BE49-F238E27FC236}">
+                <a16:creationId xmlns:a16="http://schemas.microsoft.com/office/drawing/2014/main" id="{86400A03-C8F4-8FE3-26D2-C6C135DA3B52}"/>
+              </a:ext>
+            </a:extLst>
+          </p:cNvPr>
+          <p:cNvSpPr>
+            <a:spLocks noGrp="1"/>
+          </p:cNvSpPr>
+          <p:nvPr>
+            <p:ph sz="half" idx="15"/>
+          </p:nvPr>
+        </p:nvSpPr>
+        <p:spPr/>
+        <p:txBody>
+          <a:bodyPr/>
+          <a:lstStyle/>
+          <a:p>
+            <a:endParaRPr lang="en-US"/>
+          </a:p>
+        </p:txBody>
+      </p:sp>
+    </p:spTree>
+    <p:extLst>
+      <p:ext uri="{BB962C8B-B14F-4D97-AF65-F5344CB8AC3E}">
+        <p14:creationId xmlns:p14="http://schemas.microsoft.com/office/powerpoint/2010/main" val="3245063184"/>
+      </p:ext>
+    </p:extLst>
+  </p:cSld>
+  <p:clrMapOvr>
+    <a:masterClrMapping/>
+  </p:clrMapOvr>
+</p:sld>
+</file>
+
+<file path=ppt/slides/slide11.xml><?xml version="1.0" encoding="utf-8"?>
 <p:sld xmlns:a="http://schemas.openxmlformats.org/drawingml/2006/main" xmlns:r="http://schemas.openxmlformats.org/officeDocument/2006/relationships" xmlns:p="http://schemas.openxmlformats.org/presentationml/2006/main">
   <p:cSld>
     <p:spTree>
@@ -21337,7 +21663,7 @@
         </p:nvSpPr>
         <p:spPr>
           <a:xfrm>
-            <a:off x="771736" y="896112"/>
+            <a:off x="639180" y="762000"/>
             <a:ext cx="9389288" cy="727415"/>
           </a:xfrm>
         </p:spPr>
@@ -21377,7 +21703,7 @@
             <a:fld id="{B5CEABB6-07DC-46E8-9B57-56EC44A396E5}" type="slidenum">
               <a:rPr lang="en-US" smtClean="0"/>
               <a:pPr/>
-              <a:t>10</a:t>
+              <a:t>11</a:t>
             </a:fld>
             <a:endParaRPr lang="en-US" dirty="0"/>
           </a:p>
@@ -21517,7 +21843,7 @@
 </p:sld>
 </file>
 
-<file path=ppt/slides/slide11.xml><?xml version="1.0" encoding="utf-8"?>
+<file path=ppt/slides/slide12.xml><?xml version="1.0" encoding="utf-8"?>
 <p:sld xmlns:a="http://schemas.openxmlformats.org/drawingml/2006/main" xmlns:r="http://schemas.openxmlformats.org/officeDocument/2006/relationships" xmlns:p="http://schemas.openxmlformats.org/presentationml/2006/main">
   <p:cSld>
     <p:spTree>
@@ -21600,7 +21926,7 @@
             <a:fld id="{B5CEABB6-07DC-46E8-9B57-56EC44A396E5}" type="slidenum">
               <a:rPr lang="en-US" smtClean="0"/>
               <a:pPr/>
-              <a:t>11</a:t>
+              <a:t>12</a:t>
             </a:fld>
             <a:endParaRPr lang="en-US" dirty="0"/>
           </a:p>
@@ -21740,7 +22066,7 @@
 </p:sld>
 </file>
 
-<file path=ppt/slides/slide12.xml><?xml version="1.0" encoding="utf-8"?>
+<file path=ppt/slides/slide13.xml><?xml version="1.0" encoding="utf-8"?>
 <p:sld xmlns:a="http://schemas.openxmlformats.org/drawingml/2006/main" xmlns:r="http://schemas.openxmlformats.org/officeDocument/2006/relationships" xmlns:p="http://schemas.openxmlformats.org/presentationml/2006/main">
   <p:cSld>
     <p:spTree>
@@ -21823,7 +22149,7 @@
             <a:fld id="{B5CEABB6-07DC-46E8-9B57-56EC44A396E5}" type="slidenum">
               <a:rPr lang="en-US" smtClean="0"/>
               <a:pPr/>
-              <a:t>12</a:t>
+              <a:t>13</a:t>
             </a:fld>
             <a:endParaRPr lang="en-US" dirty="0"/>
           </a:p>
@@ -21963,7 +22289,7 @@
 </p:sld>
 </file>
 
-<file path=ppt/slides/slide13.xml><?xml version="1.0" encoding="utf-8"?>
+<file path=ppt/slides/slide14.xml><?xml version="1.0" encoding="utf-8"?>
 <p:sld xmlns:a="http://schemas.openxmlformats.org/drawingml/2006/main" xmlns:r="http://schemas.openxmlformats.org/officeDocument/2006/relationships" xmlns:p="http://schemas.openxmlformats.org/presentationml/2006/main">
   <p:cSld>
     <p:spTree>
@@ -22046,7 +22372,7 @@
             <a:fld id="{B5CEABB6-07DC-46E8-9B57-56EC44A396E5}" type="slidenum">
               <a:rPr lang="en-US" smtClean="0"/>
               <a:pPr/>
-              <a:t>13</a:t>
+              <a:t>14</a:t>
             </a:fld>
             <a:endParaRPr lang="en-US" dirty="0"/>
           </a:p>
@@ -22115,7 +22441,7 @@
 </p:sld>
 </file>
 
-<file path=ppt/slides/slide14.xml><?xml version="1.0" encoding="utf-8"?>
+<file path=ppt/slides/slide15.xml><?xml version="1.0" encoding="utf-8"?>
 <p:sld xmlns:a="http://schemas.openxmlformats.org/drawingml/2006/main" xmlns:r="http://schemas.openxmlformats.org/officeDocument/2006/relationships" xmlns:p="http://schemas.openxmlformats.org/presentationml/2006/main">
   <p:cSld>
     <p:spTree>
